--- a/media/exports/reports/2026-10/volunteers.pptx
+++ b/media/exports/reports/2026-10/volunteers.pptx
@@ -197,22 +197,22 @@
               <c:strCache>
                 <c:ptCount val="6"/>
                 <c:pt idx="0">
-                  <c:v>Mental health first aid</c:v>
+                  <c:v>Volunteer coordinator</c:v>
                 </c:pt>
                 <c:pt idx="1">
                   <c:v>Youth outreach</c:v>
                 </c:pt>
                 <c:pt idx="2">
+                  <c:v>Housing support</c:v>
+                </c:pt>
+                <c:pt idx="3">
+                  <c:v>Digital literacy</c:v>
+                </c:pt>
+                <c:pt idx="4">
                   <c:v>Community meals</c:v>
                 </c:pt>
-                <c:pt idx="3">
-                  <c:v>Volunteer coordinator</c:v>
-                </c:pt>
-                <c:pt idx="4">
-                  <c:v>Housing support</c:v>
-                </c:pt>
                 <c:pt idx="5">
-                  <c:v>Digital literacy</c:v>
+                  <c:v>Mental health first aid</c:v>
                 </c:pt>
               </c:strCache>
             </c:strRef>
@@ -224,22 +224,22 @@
                 <c:formatCode>#,##0;[Red](#,##0)</c:formatCode>
                 <c:ptCount val="6"/>
                 <c:pt idx="0">
-                  <c:v>6.0</c:v>
+                  <c:v>7.5</c:v>
                 </c:pt>
                 <c:pt idx="1">
-                  <c:v>12.0</c:v>
+                  <c:v>14.0</c:v>
                 </c:pt>
                 <c:pt idx="2">
-                  <c:v>18.0</c:v>
+                  <c:v>20.5</c:v>
                 </c:pt>
                 <c:pt idx="3">
-                  <c:v>25.0</c:v>
+                  <c:v>21.5</c:v>
                 </c:pt>
                 <c:pt idx="4">
-                  <c:v>27.5</c:v>
+                  <c:v>23.5</c:v>
                 </c:pt>
                 <c:pt idx="5">
-                  <c:v>34.0</c:v>
+                  <c:v>29.0</c:v>
                 </c:pt>
               </c:numCache>
             </c:numRef>
@@ -303,7 +303,7 @@
       <c:valAx>
         <c:axId val="-2113994440"/>
         <c:scaling>
-          <c:max val="39.099999999999994"/>
+          <c:max val="33.349999999999994"/>
           <c:min val="0.0"/>
         </c:scaling>
         <c:delete/>
@@ -469,76 +469,76 @@
                 <c:formatCode>#,##0;[Red](#,##0)</c:formatCode>
                 <c:ptCount val="24"/>
                 <c:pt idx="0">
-                  <c:v>392.0</c:v>
+                  <c:v>373.5</c:v>
                 </c:pt>
                 <c:pt idx="1">
-                  <c:v>363.5</c:v>
+                  <c:v>383.5</c:v>
                 </c:pt>
                 <c:pt idx="2">
-                  <c:v>399.0</c:v>
+                  <c:v>387.5</c:v>
                 </c:pt>
                 <c:pt idx="3">
-                  <c:v>422.0</c:v>
+                  <c:v>376.5</c:v>
                 </c:pt>
                 <c:pt idx="4">
-                  <c:v>451.5</c:v>
+                  <c:v>444.0</c:v>
                 </c:pt>
                 <c:pt idx="5">
-                  <c:v>445.0</c:v>
+                  <c:v>422.5</c:v>
                 </c:pt>
                 <c:pt idx="6">
-                  <c:v>513.0</c:v>
+                  <c:v>562.0</c:v>
                 </c:pt>
                 <c:pt idx="7">
-                  <c:v>529.0</c:v>
+                  <c:v>568.0</c:v>
                 </c:pt>
                 <c:pt idx="8">
-                  <c:v>586.0</c:v>
+                  <c:v>609.5</c:v>
                 </c:pt>
                 <c:pt idx="9">
-                  <c:v>560.5</c:v>
+                  <c:v>627.0</c:v>
                 </c:pt>
                 <c:pt idx="10">
-                  <c:v>625.5</c:v>
+                  <c:v>708.5</c:v>
                 </c:pt>
                 <c:pt idx="11">
-                  <c:v>669.5</c:v>
+                  <c:v>817.0</c:v>
                 </c:pt>
                 <c:pt idx="12">
-                  <c:v>626.5</c:v>
+                  <c:v>780.5</c:v>
                 </c:pt>
                 <c:pt idx="13">
-                  <c:v>683.0</c:v>
+                  <c:v>830.5</c:v>
                 </c:pt>
                 <c:pt idx="14">
-                  <c:v>711.5</c:v>
+                  <c:v>817.5</c:v>
                 </c:pt>
                 <c:pt idx="15">
-                  <c:v>700.0</c:v>
+                  <c:v>781.0</c:v>
                 </c:pt>
                 <c:pt idx="16">
-                  <c:v>772.0</c:v>
+                  <c:v>870.0</c:v>
                 </c:pt>
                 <c:pt idx="17">
-                  <c:v>794.5</c:v>
+                  <c:v>816.0</c:v>
                 </c:pt>
                 <c:pt idx="18">
-                  <c:v>811.0</c:v>
+                  <c:v>830.5</c:v>
                 </c:pt>
                 <c:pt idx="19">
-                  <c:v>819.0</c:v>
+                  <c:v>878.5</c:v>
                 </c:pt>
                 <c:pt idx="20">
-                  <c:v>918.0</c:v>
+                  <c:v>938.0</c:v>
                 </c:pt>
                 <c:pt idx="21">
-                  <c:v>885.5</c:v>
+                  <c:v>867.5</c:v>
                 </c:pt>
                 <c:pt idx="22">
-                  <c:v>919.5</c:v>
+                  <c:v>925.0</c:v>
                 </c:pt>
                 <c:pt idx="23">
-                  <c:v>122.5</c:v>
+                  <c:v>116.0</c:v>
                 </c:pt>
               </c:numCache>
             </c:numRef>
@@ -1112,7 +1112,7 @@
           <a:lstStyle/>
           <a:p>
             <a:r>
-              <a:t>How many volunteer hours go into each program?. Volunteer hours, October so far: 122.5 h; Volunteers who did a shift, October so far: 26; Hours per volunteer, October so far: 4.7 h; October last year: 669.5 h. 26 volunteers gave 122.5 h in October so far, against 919.5 h in September. Digital literacy drew the most (34.0 h, 27.8%). Mental health first aid had the fewest volunteer hours (6.0 h). Hours are down 81.7% on October last year.</a:t>
+              <a:t>How many volunteer hours go into each program?. Volunteer hours, October so far: 116.0 h; Volunteers who did a shift, October so far: 27; Hours per volunteer, October so far: 4.3 h; October last year: 817.0 h. 27 volunteers gave 116.0 h in October so far, against 925.0 h in September. Mental health first aid drew the most (29.0 h, 25.0%). Volunteer coordinator had the fewest volunteer hours (7.5 h). Hours are down 85.8% on October last year.</a:t>
             </a:r>
           </a:p>
         </p:txBody>
@@ -4581,7 +4581,7 @@
                 </a:solidFill>
                 <a:latin typeface="Roboto"/>
               </a:rPr>
-              <a:t>Data retrieved 2pm, Tue 6 Oct 2026 · Generated 8 Oct 2026, 6:29pm · Sample data · Made with Python (python-pptx)</a:t>
+              <a:t>Data retrieved 2pm, Tue 6 Oct 2026 · Generated 8 Oct 2026, 11:41pm · Sample data · Made with Python (python-pptx)</a:t>
             </a:r>
           </a:p>
         </p:txBody>
@@ -4927,7 +4927,7 @@
                 </a:solidFill>
                 <a:latin typeface="Roboto"/>
               </a:rPr>
-              <a:t>122.5 h</a:t>
+              <a:t>116.0 h</a:t>
             </a:r>
           </a:p>
         </p:txBody>
@@ -4966,7 +4966,7 @@
                 </a:solidFill>
                 <a:latin typeface="Roboto"/>
               </a:rPr>
-              <a:t>September 919.5 h</a:t>
+              <a:t>September 925.0 h</a:t>
             </a:r>
           </a:p>
         </p:txBody>
@@ -5093,7 +5093,7 @@
                 </a:solidFill>
                 <a:latin typeface="Roboto"/>
               </a:rPr>
-              <a:t>26</a:t>
+              <a:t>27</a:t>
             </a:r>
           </a:p>
         </p:txBody>
@@ -5132,7 +5132,7 @@
                 </a:solidFill>
                 <a:latin typeface="Roboto"/>
               </a:rPr>
-              <a:t>September 60</a:t>
+              <a:t>September 59</a:t>
             </a:r>
           </a:p>
         </p:txBody>
@@ -5259,7 +5259,7 @@
                 </a:solidFill>
                 <a:latin typeface="Roboto"/>
               </a:rPr>
-              <a:t>4.7 h</a:t>
+              <a:t>4.3 h</a:t>
             </a:r>
           </a:p>
         </p:txBody>
@@ -5425,7 +5425,7 @@
                 </a:solidFill>
                 <a:latin typeface="Roboto"/>
               </a:rPr>
-              <a:t>669.5 h</a:t>
+              <a:t>817.0 h</a:t>
             </a:r>
           </a:p>
         </p:txBody>
@@ -5464,7 +5464,7 @@
                 </a:solidFill>
                 <a:latin typeface="Roboto"/>
               </a:rPr>
-              <a:t>44 volunteers</a:t>
+              <a:t>54 volunteers</a:t>
             </a:r>
           </a:p>
         </p:txBody>
@@ -5609,7 +5609,7 @@
                 </a:solidFill>
                 <a:latin typeface="Roboto"/>
               </a:rPr>
-              <a:t>26 volunteers gave 122.5 h in October so far, against 919.5 h in September. Digital literacy drew the most (34.0 h, 27.8%).</a:t>
+              <a:t>27 volunteers gave 116.0 h in October so far, against 925.0 h in September. Mental health first aid drew the most (29.0 h, 25.0%).</a:t>
             </a:r>
           </a:p>
         </p:txBody>
@@ -5736,7 +5736,7 @@
                 </a:solidFill>
                 <a:latin typeface="Roboto"/>
               </a:rPr>
-              <a:t>Mental health first aid had the fewest volunteer hours (6.0 h). Hours are down 81.7% on October last year.</a:t>
+              <a:t>Volunteer coordinator had the fewest volunteer hours (7.5 h). Hours are down 85.8% on October last year.</a:t>
             </a:r>
           </a:p>
         </p:txBody>
@@ -5814,7 +5814,7 @@
                 </a:solidFill>
                 <a:latin typeface="Roboto"/>
               </a:rPr>
-              <a:t>Data retrieved 2pm, Tue 6 Oct 2026 · Generated 8 Oct 2026, 6:29pm · Sample data · Made with Python (python-pptx)</a:t>
+              <a:t>Data retrieved 2pm, Tue 6 Oct 2026 · Generated 8 Oct 2026, 11:41pm · Sample data · Made with Python (python-pptx)</a:t>
             </a:r>
           </a:p>
         </p:txBody>
@@ -6129,7 +6129,7 @@
                 </a:solidFill>
                 <a:latin typeface="Roboto"/>
               </a:rPr>
-              <a:t>Data retrieved 2pm, Tue 6 Oct 2026 · Generated 8 Oct 2026, 6:29pm · Sample data · Made with Python (python-pptx)</a:t>
+              <a:t>Data retrieved 2pm, Tue 6 Oct 2026 · Generated 8 Oct 2026, 11:41pm · Sample data · Made with Python (python-pptx)</a:t>
             </a:r>
           </a:p>
         </p:txBody>

--- a/media/exports/reports/2026-10/volunteers.pptx
+++ b/media/exports/reports/2026-10/volunteers.pptx
@@ -1042,7 +1042,7 @@
           <a:lstStyle/>
           <a:p>
             <a:r>
-              <a:t>How many volunteer hours go into each program?. Sample Community Services Ltd. Period: October 2026 to date. Every volunteer shift: who (a code, not a name), which program, and how many hours.</a:t>
+              <a:t>How many volunteer hours go into each program?. Sample Community Services Ltd. Period: October 2026 to date. In short: 116.0 h of volunteer time in October so far, from 27 volunteers; most went to Mental health first aid. Every volunteer shift: who (a code, not a name), which program, and how many hours.</a:t>
             </a:r>
           </a:p>
         </p:txBody>
@@ -4407,7 +4407,7 @@
         <p:spPr>
           <a:xfrm>
             <a:off x="457200" y="3703320"/>
-            <a:ext cx="11277295" cy="313690"/>
+            <a:ext cx="11277295" cy="535940"/>
           </a:xfrm>
           <a:prstGeom prst="rect">
             <a:avLst/>
@@ -4432,7 +4432,7 @@
                 </a:solidFill>
                 <a:latin typeface="Roboto"/>
               </a:rPr>
-              <a:t>Period: October 2026 to date. Every volunteer shift: who (a code, not a name), which program, and how many hours.</a:t>
+              <a:t>Period: October 2026 to date. In short: 116.0 h of volunteer time in October so far, from 27 volunteers; most went to Mental health first aid. Every volunteer shift: who (a code, not a name), which program, and how many hours.</a:t>
             </a:r>
           </a:p>
         </p:txBody>
@@ -4445,7 +4445,7 @@
         </p:nvSpPr>
         <p:spPr>
           <a:xfrm>
-            <a:off x="457200" y="4108450"/>
+            <a:off x="457200" y="4330700"/>
             <a:ext cx="11277295" cy="1097280"/>
           </a:xfrm>
           <a:prstGeom prst="rect">
@@ -4581,7 +4581,7 @@
                 </a:solidFill>
                 <a:latin typeface="Roboto"/>
               </a:rPr>
-              <a:t>Data retrieved 2pm, Tue 6 Oct 2026 · Generated 8 Oct 2026, 11:41pm · Sample data · Made with Python (python-pptx)</a:t>
+              <a:t>Data retrieved 2pm, Tue 6 Oct 2026 · Generated 10 Oct 2026, 9:55pm · Sample data · Made with Python (python-pptx)</a:t>
             </a:r>
           </a:p>
         </p:txBody>
@@ -5814,7 +5814,7 @@
                 </a:solidFill>
                 <a:latin typeface="Roboto"/>
               </a:rPr>
-              <a:t>Data retrieved 2pm, Tue 6 Oct 2026 · Generated 8 Oct 2026, 11:41pm · Sample data · Made with Python (python-pptx)</a:t>
+              <a:t>Data retrieved 2pm, Tue 6 Oct 2026 · Generated 10 Oct 2026, 9:55pm · Sample data · Made with Python (python-pptx)</a:t>
             </a:r>
           </a:p>
         </p:txBody>
@@ -6129,7 +6129,7 @@
                 </a:solidFill>
                 <a:latin typeface="Roboto"/>
               </a:rPr>
-              <a:t>Data retrieved 2pm, Tue 6 Oct 2026 · Generated 8 Oct 2026, 11:41pm · Sample data · Made with Python (python-pptx)</a:t>
+              <a:t>Data retrieved 2pm, Tue 6 Oct 2026 · Generated 10 Oct 2026, 9:55pm · Sample data · Made with Python (python-pptx)</a:t>
             </a:r>
           </a:p>
         </p:txBody>
